--- a/decks/geog-africa/geog-africa_ch1_africa-on-the-map.pptx
+++ b/decks/geog-africa/geog-africa_ch1_africa-on-the-map.pptx
@@ -124,30 +124,30 @@
   <p:extLst>
     <p:ext uri="{521415D9-36F7-43E2-AB2F-B90AF26B5E84}">
       <p14:sectionLst xmlns:p14="http://schemas.microsoft.com/office/powerpoint/2010/main">
-        <p14:section name="Opening" id="{0b8893d8-2359-46db-132f-2b5f65cd65f3}">
+        <p14:section name="Opening" id="{4cd3b77e-e5f7-95cb-7bb1-4c2c47cf0dcd}">
           <p14:sldIdLst>
             <p14:sldId id="256"/>
           </p14:sldIdLst>
         </p14:section>
-        <p14:section name="Gate" id="{74cef73c-4bc6-6c66-0963-6bbd4871ec98}">
+        <p14:section name="Gate" id="{4e12ad06-85e6-1eec-bb53-7c0ad9c97db3}">
           <p14:sldIdLst>
             <p14:sldId id="257"/>
             <p14:sldId id="258"/>
           </p14:sldIdLst>
         </p14:section>
-        <p14:section name="Pre-teach" id="{7737cc4e-ddd8-5d1c-222c-ed33381a5d07}">
+        <p14:section name="Pre-teach" id="{1dd93d51-dc5e-cc9c-c932-9fe787a7eb8a}">
           <p14:sldIdLst>
             <p14:sldId id="259"/>
             <p14:sldId id="260"/>
           </p14:sldIdLst>
         </p14:section>
-        <p14:section name="Read-along" id="{29c16037-ea2d-be0e-4715-ce30207d7a69}">
+        <p14:section name="Read-along" id="{01877446-636c-7e0b-9fc1-c486d40270d5}">
           <p14:sldIdLst>
             <p14:sldId id="261"/>
             <p14:sldId id="262"/>
           </p14:sldIdLst>
         </p14:section>
-        <p14:section name="Teach" id="{a0de31b4-695d-2306-c69d-1340f9a204f4}">
+        <p14:section name="Teach" id="{5a684376-9e3f-1853-2332-acc22390e2bb}">
           <p14:sldIdLst>
             <p14:sldId id="263"/>
             <p14:sldId id="264"/>
@@ -155,19 +155,19 @@
             <p14:sldId id="266"/>
           </p14:sldIdLst>
         </p14:section>
-        <p14:section name="Routes" id="{a433b63c-dd47-8d58-8fb8-e285233064b5}">
+        <p14:section name="Routes" id="{7a325dbd-18b4-a9ac-b070-dffbd368b04a}">
           <p14:sldIdLst>
             <p14:sldId id="267"/>
             <p14:sldId id="268"/>
             <p14:sldId id="269"/>
           </p14:sldIdLst>
         </p14:section>
-        <p14:section name="Close" id="{e984a8ac-2430-b451-ac74-9c127fe07dee}">
+        <p14:section name="Close" id="{eb1c5573-ab4d-b38f-43b6-2a9e0e3b68a5}">
           <p14:sldIdLst>
             <p14:sldId id="270"/>
           </p14:sldIdLst>
         </p14:section>
-        <p14:section name="Answers" id="{2f3ca215-4845-180d-969c-64403ac5b5d2}">
+        <p14:section name="Answers" id="{cde1fb2f-b772-beaa-4889-3e284f4305cb}">
           <p14:sldIdLst>
             <p14:sldId id="271"/>
             <p14:sldId id="272"/>
